--- a/public/fun/cards/food/food-08.pptx
+++ b/public/fun/cards/food/food-08.pptx
@@ -3085,7 +3085,7 @@
     <p:bg>
       <p:bgPr>
         <a:solidFill>
-          <a:srgbClr val="F0FAF3"/>
+          <a:srgbClr val="0E1116"/>
         </a:solidFill>
         <a:effectLst/>
       </p:bgPr>
@@ -3105,14 +3105,14 @@
         </p:nvSpPr>
         <p:spPr>
           <a:xfrm>
-            <a:off x="1944000" y="216000"/>
-            <a:ext cx="10800" cy="1368000"/>
+            <a:off x="252000" y="144000"/>
+            <a:ext cx="201600" cy="21600"/>
           </a:xfrm>
           <a:prstGeom prst="rect">
             <a:avLst/>
           </a:prstGeom>
           <a:solidFill>
-            <a:srgbClr val="2B8245"/>
+            <a:srgbClr val="FFC800"/>
           </a:solidFill>
           <a:ln>
             <a:noFill/>
@@ -3134,8 +3134,8 @@
         </p:nvSpPr>
         <p:spPr>
           <a:xfrm>
-            <a:off x="216000" y="201600"/>
-            <a:ext cx="1584000" cy="100800"/>
+            <a:off x="252000" y="273600"/>
+            <a:ext cx="2160000" cy="360000"/>
           </a:xfrm>
           <a:prstGeom prst="rect">
             <a:avLst/>
@@ -3150,82 +3150,32 @@
           <a:p>
             <a:pPr algn="l">
               <a:lnSpc>
-                <a:spcPts val="1015"/>
+                <a:spcPts val="3190"/>
               </a:lnSpc>
             </a:pPr>
             <a:r>
-              <a:rPr sz="700" b="1" spc="300">
+              <a:rPr sz="2200" b="1">
                 <a:solidFill>
-                  <a:srgbClr val="57725F"/>
+                  <a:srgbClr val="FFFFFF"/>
                 </a:solidFill>
                 <a:latin typeface="맑은 고딕"/>
                 <a:ea typeface="맑은 고딕"/>
               </a:rPr>
-              <a:t>상호명</a:t>
-            </a:r>
-          </a:p>
-        </p:txBody>
-      </p:sp>
-      <p:sp>
-        <p:nvSpPr>
-          <p:cNvPr id="4" name="Oval 3"/>
-          <p:cNvSpPr/>
-          <p:nvPr/>
-        </p:nvSpPr>
-        <p:spPr>
-          <a:xfrm rot="2280000">
-            <a:off x="343728" y="440208"/>
-            <a:ext cx="104544" cy="199584"/>
-          </a:xfrm>
-          <a:prstGeom prst="ellipse">
-            <a:avLst/>
-          </a:prstGeom>
-          <a:solidFill>
-            <a:srgbClr val="2B8245"/>
-          </a:solidFill>
-          <a:ln>
-            <a:noFill/>
-          </a:ln>
-        </p:spPr>
-        <p:txBody>
-          <a:bodyPr rtlCol="0" anchor="ctr"/>
-          <a:lstStyle/>
-          <a:p>
-            <a:pPr algn="ctr"/>
-          </a:p>
-        </p:txBody>
-      </p:sp>
-      <p:cxnSp>
-        <p:nvCxnSpPr>
-          <p:cNvPr id="5" name="Connector 4"/>
-          <p:cNvCxnSpPr/>
-          <p:nvPr/>
-        </p:nvCxnSpPr>
-        <p:spPr>
-          <a:xfrm flipV="1">
-            <a:off x="334224" y="468720"/>
-            <a:ext cx="118800" cy="142560"/>
-          </a:xfrm>
-          <a:prstGeom prst="line">
-            <a:avLst/>
-          </a:prstGeom>
-          <a:ln w="9504">
-            <a:solidFill>
-              <a:srgbClr val="DEF5E5"/>
-            </a:solidFill>
-          </a:ln>
-        </p:spPr>
-      </p:cxnSp>
-      <p:sp>
-        <p:nvSpPr>
-          <p:cNvPr id="6" name="텍스트"/>
+              <a:t>윤시우</a:t>
+            </a:r>
+          </a:p>
+        </p:txBody>
+      </p:sp>
+      <p:sp>
+        <p:nvSpPr>
+          <p:cNvPr id="4" name="텍스트"/>
           <p:cNvSpPr txBox="1"/>
           <p:nvPr/>
         </p:nvSpPr>
         <p:spPr>
           <a:xfrm>
-            <a:off x="216000" y="972000"/>
-            <a:ext cx="1728000" cy="122400"/>
+            <a:off x="252000" y="676800"/>
+            <a:ext cx="2160000" cy="171451"/>
           </a:xfrm>
           <a:prstGeom prst="rect">
             <a:avLst/>
@@ -3240,13 +3190,13 @@
           <a:p>
             <a:pPr algn="l">
               <a:lnSpc>
-                <a:spcPts val="1232"/>
+                <a:spcPts val="1305"/>
               </a:lnSpc>
             </a:pPr>
             <a:r>
-              <a:rPr sz="850" b="1">
+              <a:rPr sz="900" b="0">
                 <a:solidFill>
-                  <a:srgbClr val="297B42"/>
+                  <a:srgbClr val="A3A9B5"/>
                 </a:solidFill>
                 <a:latin typeface="맑은 고딕"/>
                 <a:ea typeface="맑은 고딕"/>
@@ -3258,14 +3208,14 @@
       </p:sp>
       <p:sp>
         <p:nvSpPr>
-          <p:cNvPr id="7" name="텍스트"/>
+          <p:cNvPr id="5" name="텍스트"/>
           <p:cNvSpPr txBox="1"/>
           <p:nvPr/>
         </p:nvSpPr>
         <p:spPr>
           <a:xfrm>
-            <a:off x="216000" y="1123200"/>
-            <a:ext cx="1728000" cy="346712"/>
+            <a:off x="1548000" y="230400"/>
+            <a:ext cx="1440000" cy="123826"/>
           </a:xfrm>
           <a:prstGeom prst="rect">
             <a:avLst/>
@@ -3278,34 +3228,55 @@
           </a:bodyPr>
           <a:lstStyle/>
           <a:p>
-            <a:pPr algn="l">
+            <a:pPr algn="r">
               <a:lnSpc>
-                <a:spcPts val="3045"/>
+                <a:spcPts val="942"/>
               </a:lnSpc>
             </a:pPr>
             <a:r>
-              <a:rPr sz="2100" b="1" spc="50">
+              <a:rPr sz="650" b="1" spc="200">
                 <a:solidFill>
-                  <a:srgbClr val="143D21"/>
+                  <a:srgbClr val="A3A9B5"/>
                 </a:solidFill>
                 <a:latin typeface="맑은 고딕"/>
                 <a:ea typeface="맑은 고딕"/>
               </a:rPr>
-              <a:t>윤시우</a:t>
-            </a:r>
-          </a:p>
-        </p:txBody>
-      </p:sp>
-      <p:sp>
-        <p:nvSpPr>
-          <p:cNvPr id="8" name="텍스트"/>
+              <a:t>상호명</a:t>
+            </a:r>
+          </a:p>
+        </p:txBody>
+      </p:sp>
+      <p:cxnSp>
+        <p:nvCxnSpPr>
+          <p:cNvPr id="6" name="Connector 5"/>
+          <p:cNvCxnSpPr/>
+          <p:nvPr/>
+        </p:nvCxnSpPr>
+        <p:spPr>
+          <a:xfrm>
+            <a:off x="252000" y="1051200"/>
+            <a:ext cx="2736000" cy="0"/>
+          </a:xfrm>
+          <a:prstGeom prst="line">
+            <a:avLst/>
+          </a:prstGeom>
+          <a:ln w="5760">
+            <a:solidFill>
+              <a:srgbClr val="2A2F38"/>
+            </a:solidFill>
+          </a:ln>
+        </p:spPr>
+      </p:cxnSp>
+      <p:sp>
+        <p:nvSpPr>
+          <p:cNvPr id="7" name="텍스트"/>
           <p:cNvSpPr txBox="1"/>
           <p:nvPr/>
         </p:nvSpPr>
         <p:spPr>
           <a:xfrm>
-            <a:off x="2073600" y="540000"/>
-            <a:ext cx="122400" cy="168911"/>
+            <a:off x="252000" y="1123200"/>
+            <a:ext cx="576000" cy="99061"/>
           </a:xfrm>
           <a:prstGeom prst="rect">
             <a:avLst/>
@@ -3320,32 +3291,32 @@
           <a:p>
             <a:pPr algn="l">
               <a:lnSpc>
-                <a:spcPts val="1015"/>
+                <a:spcPts val="754"/>
               </a:lnSpc>
             </a:pPr>
             <a:r>
-              <a:rPr sz="700" b="1">
+              <a:rPr sz="520" b="1" spc="150">
                 <a:solidFill>
-                  <a:srgbClr val="297B42"/>
+                  <a:srgbClr val="A3A9B5"/>
                 </a:solidFill>
                 <a:latin typeface="맑은 고딕"/>
                 <a:ea typeface="맑은 고딕"/>
               </a:rPr>
-              <a:t>T</a:t>
-            </a:r>
-          </a:p>
-        </p:txBody>
-      </p:sp>
-      <p:sp>
-        <p:nvSpPr>
-          <p:cNvPr id="9" name="텍스트"/>
+              <a:t>TEL</a:t>
+            </a:r>
+          </a:p>
+        </p:txBody>
+      </p:sp>
+      <p:sp>
+        <p:nvSpPr>
+          <p:cNvPr id="8" name="텍스트"/>
           <p:cNvSpPr txBox="1"/>
           <p:nvPr/>
         </p:nvSpPr>
         <p:spPr>
           <a:xfrm>
-            <a:off x="2217600" y="540000"/>
-            <a:ext cx="900000" cy="168911"/>
+            <a:off x="900000" y="1101600"/>
+            <a:ext cx="2088000" cy="142876"/>
           </a:xfrm>
           <a:prstGeom prst="rect">
             <a:avLst/>
@@ -3360,13 +3331,13 @@
           <a:p>
             <a:pPr algn="l">
               <a:lnSpc>
-                <a:spcPts val="1015"/>
+                <a:spcPts val="1087"/>
               </a:lnSpc>
             </a:pPr>
             <a:r>
-              <a:rPr sz="700" b="0">
+              <a:rPr sz="750" b="0">
                 <a:solidFill>
-                  <a:srgbClr val="143D21"/>
+                  <a:srgbClr val="FFFFFF"/>
                 </a:solidFill>
                 <a:latin typeface="맑은 고딕"/>
                 <a:ea typeface="맑은 고딕"/>
@@ -3376,6 +3347,27 @@
           </a:p>
         </p:txBody>
       </p:sp>
+      <p:cxnSp>
+        <p:nvCxnSpPr>
+          <p:cNvPr id="9" name="Connector 8"/>
+          <p:cNvCxnSpPr/>
+          <p:nvPr/>
+        </p:nvCxnSpPr>
+        <p:spPr>
+          <a:xfrm>
+            <a:off x="252000" y="1274400"/>
+            <a:ext cx="2736000" cy="0"/>
+          </a:xfrm>
+          <a:prstGeom prst="line">
+            <a:avLst/>
+          </a:prstGeom>
+          <a:ln w="5760">
+            <a:solidFill>
+              <a:srgbClr val="2A2F38"/>
+            </a:solidFill>
+          </a:ln>
+        </p:spPr>
+      </p:cxnSp>
       <p:sp>
         <p:nvSpPr>
           <p:cNvPr id="10" name="텍스트"/>
@@ -3384,8 +3376,8 @@
         </p:nvSpPr>
         <p:spPr>
           <a:xfrm>
-            <a:off x="2073600" y="708911"/>
-            <a:ext cx="122400" cy="168911"/>
+            <a:off x="252000" y="1346400"/>
+            <a:ext cx="576000" cy="99061"/>
           </a:xfrm>
           <a:prstGeom prst="rect">
             <a:avLst/>
@@ -3400,18 +3392,18 @@
           <a:p>
             <a:pPr algn="l">
               <a:lnSpc>
-                <a:spcPts val="1015"/>
+                <a:spcPts val="754"/>
               </a:lnSpc>
             </a:pPr>
             <a:r>
-              <a:rPr sz="700" b="1">
+              <a:rPr sz="520" b="1" spc="150">
                 <a:solidFill>
-                  <a:srgbClr val="297B42"/>
+                  <a:srgbClr val="A3A9B5"/>
                 </a:solidFill>
                 <a:latin typeface="맑은 고딕"/>
                 <a:ea typeface="맑은 고딕"/>
               </a:rPr>
-              <a:t>E</a:t>
+              <a:t>MAIL</a:t>
             </a:r>
           </a:p>
         </p:txBody>
@@ -3424,8 +3416,8 @@
         </p:nvSpPr>
         <p:spPr>
           <a:xfrm>
-            <a:off x="2217600" y="708911"/>
-            <a:ext cx="900000" cy="168911"/>
+            <a:off x="900000" y="1324800"/>
+            <a:ext cx="2088000" cy="142876"/>
           </a:xfrm>
           <a:prstGeom prst="rect">
             <a:avLst/>
@@ -3440,13 +3432,13 @@
           <a:p>
             <a:pPr algn="l">
               <a:lnSpc>
-                <a:spcPts val="1015"/>
+                <a:spcPts val="1087"/>
               </a:lnSpc>
             </a:pPr>
             <a:r>
-              <a:rPr sz="700" b="0">
+              <a:rPr sz="750" b="0">
                 <a:solidFill>
-                  <a:srgbClr val="143D21"/>
+                  <a:srgbClr val="FFFFFF"/>
                 </a:solidFill>
                 <a:latin typeface="맑은 고딕"/>
                 <a:ea typeface="맑은 고딕"/>
@@ -3456,16 +3448,37 @@
           </a:p>
         </p:txBody>
       </p:sp>
-      <p:sp>
-        <p:nvSpPr>
-          <p:cNvPr id="12" name="텍스트"/>
+      <p:cxnSp>
+        <p:nvCxnSpPr>
+          <p:cNvPr id="12" name="Connector 11"/>
+          <p:cNvCxnSpPr/>
+          <p:nvPr/>
+        </p:nvCxnSpPr>
+        <p:spPr>
+          <a:xfrm>
+            <a:off x="252000" y="1497600"/>
+            <a:ext cx="2736000" cy="0"/>
+          </a:xfrm>
+          <a:prstGeom prst="line">
+            <a:avLst/>
+          </a:prstGeom>
+          <a:ln w="5760">
+            <a:solidFill>
+              <a:srgbClr val="2A2F38"/>
+            </a:solidFill>
+          </a:ln>
+        </p:spPr>
+      </p:cxnSp>
+      <p:sp>
+        <p:nvSpPr>
+          <p:cNvPr id="13" name="텍스트"/>
           <p:cNvSpPr txBox="1"/>
           <p:nvPr/>
         </p:nvSpPr>
         <p:spPr>
           <a:xfrm>
-            <a:off x="2073600" y="877822"/>
-            <a:ext cx="122400" cy="168911"/>
+            <a:off x="252000" y="1569600"/>
+            <a:ext cx="576000" cy="99061"/>
           </a:xfrm>
           <a:prstGeom prst="rect">
             <a:avLst/>
@@ -3480,32 +3493,32 @@
           <a:p>
             <a:pPr algn="l">
               <a:lnSpc>
-                <a:spcPts val="1015"/>
+                <a:spcPts val="754"/>
               </a:lnSpc>
             </a:pPr>
             <a:r>
-              <a:rPr sz="700" b="1">
+              <a:rPr sz="520" b="1" spc="150">
                 <a:solidFill>
-                  <a:srgbClr val="297B42"/>
+                  <a:srgbClr val="A3A9B5"/>
                 </a:solidFill>
                 <a:latin typeface="맑은 고딕"/>
                 <a:ea typeface="맑은 고딕"/>
               </a:rPr>
-              <a:t>A</a:t>
-            </a:r>
-          </a:p>
-        </p:txBody>
-      </p:sp>
-      <p:sp>
-        <p:nvSpPr>
-          <p:cNvPr id="13" name="텍스트"/>
+              <a:t>ADDR</a:t>
+            </a:r>
+          </a:p>
+        </p:txBody>
+      </p:sp>
+      <p:sp>
+        <p:nvSpPr>
+          <p:cNvPr id="14" name="텍스트"/>
           <p:cNvSpPr txBox="1"/>
           <p:nvPr/>
         </p:nvSpPr>
         <p:spPr>
           <a:xfrm>
-            <a:off x="2217600" y="877822"/>
-            <a:ext cx="900000" cy="168911"/>
+            <a:off x="900000" y="1548000"/>
+            <a:ext cx="2088000" cy="142876"/>
           </a:xfrm>
           <a:prstGeom prst="rect">
             <a:avLst/>
@@ -3520,13 +3533,13 @@
           <a:p>
             <a:pPr algn="l">
               <a:lnSpc>
-                <a:spcPts val="1015"/>
+                <a:spcPts val="1087"/>
               </a:lnSpc>
             </a:pPr>
             <a:r>
-              <a:rPr sz="700" b="0">
+              <a:rPr sz="750" b="0">
                 <a:solidFill>
-                  <a:srgbClr val="143D21"/>
+                  <a:srgbClr val="FFFFFF"/>
                 </a:solidFill>
                 <a:latin typeface="맑은 고딕"/>
                 <a:ea typeface="맑은 고딕"/>
@@ -3536,6 +3549,27 @@
           </a:p>
         </p:txBody>
       </p:sp>
+      <p:cxnSp>
+        <p:nvCxnSpPr>
+          <p:cNvPr id="15" name="Connector 14"/>
+          <p:cNvCxnSpPr/>
+          <p:nvPr/>
+        </p:nvCxnSpPr>
+        <p:spPr>
+          <a:xfrm>
+            <a:off x="252000" y="1720800"/>
+            <a:ext cx="2736000" cy="0"/>
+          </a:xfrm>
+          <a:prstGeom prst="line">
+            <a:avLst/>
+          </a:prstGeom>
+          <a:ln w="5760">
+            <a:solidFill>
+              <a:srgbClr val="2A2F38"/>
+            </a:solidFill>
+          </a:ln>
+        </p:spPr>
+      </p:cxnSp>
     </p:spTree>
   </p:cSld>
   <p:clrMapOvr>
@@ -3550,7 +3584,7 @@
     <p:bg>
       <p:bgPr>
         <a:solidFill>
-          <a:srgbClr val="216335"/>
+          <a:srgbClr val="F3F4F6"/>
         </a:solidFill>
         <a:effectLst/>
       </p:bgPr>
@@ -3571,13 +3605,13 @@
         <p:spPr>
           <a:xfrm>
             <a:off x="0" y="0"/>
-            <a:ext cx="1224000" cy="1800000"/>
+            <a:ext cx="3240000" cy="1800000"/>
           </a:xfrm>
           <a:prstGeom prst="rect">
             <a:avLst/>
           </a:prstGeom>
           <a:solidFill>
-            <a:srgbClr val="D0F1DA"/>
+            <a:srgbClr val="FFC800"/>
           </a:solidFill>
           <a:ln>
             <a:noFill/>
@@ -3593,20 +3627,107 @@
       </p:sp>
       <p:sp>
         <p:nvSpPr>
-          <p:cNvPr id="3" name="Oval 2"/>
+          <p:cNvPr id="3" name="Freeform 2"/>
           <p:cNvSpPr/>
           <p:nvPr/>
         </p:nvSpPr>
         <p:spPr>
-          <a:xfrm rot="2280000">
-            <a:off x="493200" y="673200"/>
-            <a:ext cx="237600" cy="453600"/>
+          <a:xfrm>
+            <a:off x="2412000" y="972000"/>
+            <a:ext cx="828000" cy="828000"/>
           </a:xfrm>
-          <a:prstGeom prst="ellipse">
+          <a:custGeom>
             <a:avLst/>
-          </a:prstGeom>
+            <a:gdLst/>
+            <a:ahLst/>
+            <a:cxnLst/>
+            <a:rect l="l" t="t" r="r" b="b"/>
+            <a:pathLst>
+              <a:path w="828000" h="828000">
+                <a:moveTo>
+                  <a:pt x="828000" y="828000"/>
+                </a:moveTo>
+                <a:lnTo>
+                  <a:pt x="0" y="828000"/>
+                </a:lnTo>
+                <a:lnTo>
+                  <a:pt x="1773" y="773846"/>
+                </a:lnTo>
+                <a:lnTo>
+                  <a:pt x="7084" y="719924"/>
+                </a:lnTo>
+                <a:lnTo>
+                  <a:pt x="15910" y="666465"/>
+                </a:lnTo>
+                <a:lnTo>
+                  <a:pt x="28213" y="613698"/>
+                </a:lnTo>
+                <a:lnTo>
+                  <a:pt x="43942" y="561848"/>
+                </a:lnTo>
+                <a:lnTo>
+                  <a:pt x="63028" y="511138"/>
+                </a:lnTo>
+                <a:lnTo>
+                  <a:pt x="85389" y="461785"/>
+                </a:lnTo>
+                <a:lnTo>
+                  <a:pt x="110931" y="414000"/>
+                </a:lnTo>
+                <a:lnTo>
+                  <a:pt x="139543" y="367988"/>
+                </a:lnTo>
+                <a:lnTo>
+                  <a:pt x="171103" y="323946"/>
+                </a:lnTo>
+                <a:lnTo>
+                  <a:pt x="205477" y="282062"/>
+                </a:lnTo>
+                <a:lnTo>
+                  <a:pt x="242516" y="242516"/>
+                </a:lnTo>
+                <a:lnTo>
+                  <a:pt x="282062" y="205477"/>
+                </a:lnTo>
+                <a:lnTo>
+                  <a:pt x="323946" y="171103"/>
+                </a:lnTo>
+                <a:lnTo>
+                  <a:pt x="367988" y="139543"/>
+                </a:lnTo>
+                <a:lnTo>
+                  <a:pt x="414000" y="110931"/>
+                </a:lnTo>
+                <a:lnTo>
+                  <a:pt x="461785" y="85389"/>
+                </a:lnTo>
+                <a:lnTo>
+                  <a:pt x="511138" y="63028"/>
+                </a:lnTo>
+                <a:lnTo>
+                  <a:pt x="561848" y="43942"/>
+                </a:lnTo>
+                <a:lnTo>
+                  <a:pt x="613698" y="28213"/>
+                </a:lnTo>
+                <a:lnTo>
+                  <a:pt x="666465" y="15910"/>
+                </a:lnTo>
+                <a:lnTo>
+                  <a:pt x="719924" y="7084"/>
+                </a:lnTo>
+                <a:lnTo>
+                  <a:pt x="773846" y="1773"/>
+                </a:lnTo>
+                <a:lnTo>
+                  <a:pt x="828000" y="0"/>
+                </a:lnTo>
+                <a:close/>
+              </a:path>
+            </a:pathLst>
+          </a:custGeom>
           <a:solidFill>
-            <a:srgbClr val="666666"/>
+            <a:srgbClr val="FFD438"/>
           </a:solidFill>
           <a:ln>
             <a:noFill/>
@@ -3620,37 +3741,16 @@
           </a:p>
         </p:txBody>
       </p:sp>
-      <p:cxnSp>
-        <p:nvCxnSpPr>
-          <p:cNvPr id="4" name="Connector 3"/>
-          <p:cNvCxnSpPr/>
-          <p:nvPr/>
-        </p:nvCxnSpPr>
-        <p:spPr>
-          <a:xfrm flipV="1">
-            <a:off x="471600" y="738000"/>
-            <a:ext cx="270000" cy="324000"/>
-          </a:xfrm>
-          <a:prstGeom prst="line">
-            <a:avLst/>
-          </a:prstGeom>
-          <a:ln w="21600">
-            <a:solidFill>
-              <a:srgbClr val="D1D1D1"/>
-            </a:solidFill>
-          </a:ln>
-        </p:spPr>
-      </p:cxnSp>
-      <p:sp>
-        <p:nvSpPr>
-          <p:cNvPr id="5" name="텍스트"/>
+      <p:sp>
+        <p:nvSpPr>
+          <p:cNvPr id="4" name="텍스트"/>
           <p:cNvSpPr txBox="1"/>
           <p:nvPr/>
         </p:nvSpPr>
         <p:spPr>
           <a:xfrm>
-            <a:off x="1440000" y="432000"/>
-            <a:ext cx="1584000" cy="792000"/>
+            <a:off x="252000" y="432000"/>
+            <a:ext cx="2304000" cy="720000"/>
           </a:xfrm>
           <a:prstGeom prst="rect">
             <a:avLst/>
@@ -3658,20 +3758,20 @@
           <a:noFill/>
         </p:spPr>
         <p:txBody>
-          <a:bodyPr wrap="square" lIns="0" rIns="0" tIns="0" bIns="0" anchor="ctr">
+          <a:bodyPr wrap="square" lIns="0" rIns="0" tIns="0" bIns="0" anchor="t">
             <a:spAutoFit/>
           </a:bodyPr>
           <a:lstStyle/>
           <a:p>
             <a:pPr algn="l">
               <a:lnSpc>
-                <a:spcPts val="1667"/>
+                <a:spcPts val="1884"/>
               </a:lnSpc>
             </a:pPr>
             <a:r>
-              <a:rPr sz="1150" b="1">
+              <a:rPr sz="1300" b="1">
                 <a:solidFill>
-                  <a:srgbClr val="FFFFFF"/>
+                  <a:srgbClr val="12151C"/>
                 </a:solidFill>
                 <a:latin typeface="맑은 고딕"/>
                 <a:ea typeface="맑은 고딕"/>
@@ -3682,13 +3782,13 @@
           <a:p>
             <a:pPr algn="l">
               <a:lnSpc>
-                <a:spcPts val="1667"/>
+                <a:spcPts val="1884"/>
               </a:lnSpc>
             </a:pPr>
             <a:r>
-              <a:rPr sz="1150" b="1">
+              <a:rPr sz="1300" b="1">
                 <a:solidFill>
-                  <a:srgbClr val="FFFFFF"/>
+                  <a:srgbClr val="12151C"/>
                 </a:solidFill>
                 <a:latin typeface="맑은 고딕"/>
                 <a:ea typeface="맑은 고딕"/>
@@ -3700,43 +3800,14 @@
       </p:sp>
       <p:sp>
         <p:nvSpPr>
-          <p:cNvPr id="6" name="Rectangle 5"/>
-          <p:cNvSpPr/>
+          <p:cNvPr id="5" name="텍스트"/>
+          <p:cNvSpPr txBox="1"/>
           <p:nvPr/>
         </p:nvSpPr>
         <p:spPr>
           <a:xfrm>
-            <a:off x="1440000" y="1317600"/>
-            <a:ext cx="180000" cy="10800"/>
-          </a:xfrm>
-          <a:prstGeom prst="rect">
-            <a:avLst/>
-          </a:prstGeom>
-          <a:solidFill>
-            <a:srgbClr val="D0F1DA"/>
-          </a:solidFill>
-          <a:ln>
-            <a:noFill/>
-          </a:ln>
-        </p:spPr>
-        <p:txBody>
-          <a:bodyPr rtlCol="0" anchor="ctr"/>
-          <a:lstStyle/>
-          <a:p>
-            <a:pPr algn="ctr"/>
-          </a:p>
-        </p:txBody>
-      </p:sp>
-      <p:sp>
-        <p:nvSpPr>
-          <p:cNvPr id="7" name="텍스트"/>
-          <p:cNvSpPr txBox="1"/>
-          <p:nvPr/>
-        </p:nvSpPr>
-        <p:spPr>
-          <a:xfrm>
-            <a:off x="1440000" y="1418400"/>
-            <a:ext cx="1584000" cy="108000"/>
+            <a:off x="252000" y="1476000"/>
+            <a:ext cx="1800000" cy="133351"/>
           </a:xfrm>
           <a:prstGeom prst="rect">
             <a:avLst/>
@@ -3751,13 +3822,13 @@
           <a:p>
             <a:pPr algn="l">
               <a:lnSpc>
-                <a:spcPts val="1087"/>
+                <a:spcPts val="1015"/>
               </a:lnSpc>
             </a:pPr>
             <a:r>
-              <a:rPr sz="750" b="1" spc="200">
+              <a:rPr sz="700" b="1" spc="200">
                 <a:solidFill>
-                  <a:srgbClr val="C1D3C6"/>
+                  <a:srgbClr val="12151C"/>
                 </a:solidFill>
                 <a:latin typeface="맑은 고딕"/>
                 <a:ea typeface="맑은 고딕"/>

--- a/public/fun/cards/food/food-08.pptx
+++ b/public/fun/cards/food/food-08.pptx
@@ -3105,8 +3105,8 @@
         </p:nvSpPr>
         <p:spPr>
           <a:xfrm>
-            <a:off x="252000" y="144000"/>
-            <a:ext cx="201600" cy="21600"/>
+            <a:off x="0" y="0"/>
+            <a:ext cx="3240000" cy="36000"/>
           </a:xfrm>
           <a:prstGeom prst="rect">
             <a:avLst/>
@@ -3134,8 +3134,8 @@
         </p:nvSpPr>
         <p:spPr>
           <a:xfrm>
-            <a:off x="252000" y="273600"/>
-            <a:ext cx="2160000" cy="360000"/>
+            <a:off x="252000" y="223200"/>
+            <a:ext cx="1296000" cy="237600"/>
           </a:xfrm>
           <a:prstGeom prst="rect">
             <a:avLst/>
@@ -3150,11 +3150,11 @@
           <a:p>
             <a:pPr algn="l">
               <a:lnSpc>
-                <a:spcPts val="3190"/>
+                <a:spcPts val="1957"/>
               </a:lnSpc>
             </a:pPr>
             <a:r>
-              <a:rPr sz="2200" b="1">
+              <a:rPr sz="1350" b="1" spc="120">
                 <a:solidFill>
                   <a:srgbClr val="FFFFFF"/>
                 </a:solidFill>
@@ -3174,8 +3174,8 @@
         </p:nvSpPr>
         <p:spPr>
           <a:xfrm>
-            <a:off x="252000" y="676800"/>
-            <a:ext cx="2160000" cy="171451"/>
+            <a:off x="252000" y="475200"/>
+            <a:ext cx="1296000" cy="133351"/>
           </a:xfrm>
           <a:prstGeom prst="rect">
             <a:avLst/>
@@ -3190,11 +3190,11 @@
           <a:p>
             <a:pPr algn="l">
               <a:lnSpc>
-                <a:spcPts val="1305"/>
+                <a:spcPts val="1015"/>
               </a:lnSpc>
             </a:pPr>
             <a:r>
-              <a:rPr sz="900" b="0">
+              <a:rPr sz="700" b="0">
                 <a:solidFill>
                   <a:srgbClr val="A3A9B5"/>
                 </a:solidFill>
@@ -3214,7 +3214,7 @@
         </p:nvSpPr>
         <p:spPr>
           <a:xfrm>
-            <a:off x="1548000" y="230400"/>
+            <a:off x="1548000" y="259200"/>
             <a:ext cx="1440000" cy="123826"/>
           </a:xfrm>
           <a:prstGeom prst="rect">
@@ -3234,7 +3234,7 @@
               </a:lnSpc>
             </a:pPr>
             <a:r>
-              <a:rPr sz="650" b="1" spc="200">
+              <a:rPr sz="650" b="1" spc="220">
                 <a:solidFill>
                   <a:srgbClr val="A3A9B5"/>
                 </a:solidFill>
@@ -3254,13 +3254,13 @@
         </p:nvCxnSpPr>
         <p:spPr>
           <a:xfrm>
-            <a:off x="252000" y="1051200"/>
+            <a:off x="252000" y="907200"/>
             <a:ext cx="2736000" cy="0"/>
           </a:xfrm>
           <a:prstGeom prst="line">
             <a:avLst/>
           </a:prstGeom>
-          <a:ln w="5760">
+          <a:ln w="3600">
             <a:solidFill>
               <a:srgbClr val="2A2F38"/>
             </a:solidFill>
@@ -3275,8 +3275,8 @@
         </p:nvSpPr>
         <p:spPr>
           <a:xfrm>
-            <a:off x="252000" y="1123200"/>
-            <a:ext cx="576000" cy="99061"/>
+            <a:off x="252000" y="986400"/>
+            <a:ext cx="576000" cy="91441"/>
           </a:xfrm>
           <a:prstGeom prst="rect">
             <a:avLst/>
@@ -3291,11 +3291,11 @@
           <a:p>
             <a:pPr algn="l">
               <a:lnSpc>
-                <a:spcPts val="754"/>
+                <a:spcPts val="696"/>
               </a:lnSpc>
             </a:pPr>
             <a:r>
-              <a:rPr sz="520" b="1" spc="150">
+              <a:rPr sz="480" b="1" spc="160">
                 <a:solidFill>
                   <a:srgbClr val="A3A9B5"/>
                 </a:solidFill>
@@ -3315,8 +3315,8 @@
         </p:nvSpPr>
         <p:spPr>
           <a:xfrm>
-            <a:off x="900000" y="1101600"/>
-            <a:ext cx="2088000" cy="142876"/>
+            <a:off x="936000" y="968400"/>
+            <a:ext cx="2052000" cy="133351"/>
           </a:xfrm>
           <a:prstGeom prst="rect">
             <a:avLst/>
@@ -3331,11 +3331,11 @@
           <a:p>
             <a:pPr algn="l">
               <a:lnSpc>
-                <a:spcPts val="1087"/>
+                <a:spcPts val="1015"/>
               </a:lnSpc>
             </a:pPr>
             <a:r>
-              <a:rPr sz="750" b="0">
+              <a:rPr sz="700" b="0">
                 <a:solidFill>
                   <a:srgbClr val="FFFFFF"/>
                 </a:solidFill>
@@ -3355,13 +3355,13 @@
         </p:nvCxnSpPr>
         <p:spPr>
           <a:xfrm>
-            <a:off x="252000" y="1274400"/>
+            <a:off x="252000" y="1137600"/>
             <a:ext cx="2736000" cy="0"/>
           </a:xfrm>
           <a:prstGeom prst="line">
             <a:avLst/>
           </a:prstGeom>
-          <a:ln w="5760">
+          <a:ln w="3600">
             <a:solidFill>
               <a:srgbClr val="2A2F38"/>
             </a:solidFill>
@@ -3376,8 +3376,8 @@
         </p:nvSpPr>
         <p:spPr>
           <a:xfrm>
-            <a:off x="252000" y="1346400"/>
-            <a:ext cx="576000" cy="99061"/>
+            <a:off x="252000" y="1216800"/>
+            <a:ext cx="576000" cy="91441"/>
           </a:xfrm>
           <a:prstGeom prst="rect">
             <a:avLst/>
@@ -3392,11 +3392,11 @@
           <a:p>
             <a:pPr algn="l">
               <a:lnSpc>
-                <a:spcPts val="754"/>
+                <a:spcPts val="696"/>
               </a:lnSpc>
             </a:pPr>
             <a:r>
-              <a:rPr sz="520" b="1" spc="150">
+              <a:rPr sz="480" b="1" spc="160">
                 <a:solidFill>
                   <a:srgbClr val="A3A9B5"/>
                 </a:solidFill>
@@ -3416,8 +3416,8 @@
         </p:nvSpPr>
         <p:spPr>
           <a:xfrm>
-            <a:off x="900000" y="1324800"/>
-            <a:ext cx="2088000" cy="142876"/>
+            <a:off x="936000" y="1198800"/>
+            <a:ext cx="2052000" cy="133351"/>
           </a:xfrm>
           <a:prstGeom prst="rect">
             <a:avLst/>
@@ -3432,11 +3432,11 @@
           <a:p>
             <a:pPr algn="l">
               <a:lnSpc>
-                <a:spcPts val="1087"/>
+                <a:spcPts val="1015"/>
               </a:lnSpc>
             </a:pPr>
             <a:r>
-              <a:rPr sz="750" b="0">
+              <a:rPr sz="700" b="0">
                 <a:solidFill>
                   <a:srgbClr val="FFFFFF"/>
                 </a:solidFill>
@@ -3456,13 +3456,13 @@
         </p:nvCxnSpPr>
         <p:spPr>
           <a:xfrm>
-            <a:off x="252000" y="1497600"/>
+            <a:off x="252000" y="1368000"/>
             <a:ext cx="2736000" cy="0"/>
           </a:xfrm>
           <a:prstGeom prst="line">
             <a:avLst/>
           </a:prstGeom>
-          <a:ln w="5760">
+          <a:ln w="3600">
             <a:solidFill>
               <a:srgbClr val="2A2F38"/>
             </a:solidFill>
@@ -3477,8 +3477,8 @@
         </p:nvSpPr>
         <p:spPr>
           <a:xfrm>
-            <a:off x="252000" y="1569600"/>
-            <a:ext cx="576000" cy="99061"/>
+            <a:off x="252000" y="1447200"/>
+            <a:ext cx="576000" cy="91441"/>
           </a:xfrm>
           <a:prstGeom prst="rect">
             <a:avLst/>
@@ -3493,11 +3493,11 @@
           <a:p>
             <a:pPr algn="l">
               <a:lnSpc>
-                <a:spcPts val="754"/>
+                <a:spcPts val="696"/>
               </a:lnSpc>
             </a:pPr>
             <a:r>
-              <a:rPr sz="520" b="1" spc="150">
+              <a:rPr sz="480" b="1" spc="160">
                 <a:solidFill>
                   <a:srgbClr val="A3A9B5"/>
                 </a:solidFill>
@@ -3517,8 +3517,8 @@
         </p:nvSpPr>
         <p:spPr>
           <a:xfrm>
-            <a:off x="900000" y="1548000"/>
-            <a:ext cx="2088000" cy="142876"/>
+            <a:off x="936000" y="1429200"/>
+            <a:ext cx="2052000" cy="133351"/>
           </a:xfrm>
           <a:prstGeom prst="rect">
             <a:avLst/>
@@ -3533,11 +3533,11 @@
           <a:p>
             <a:pPr algn="l">
               <a:lnSpc>
-                <a:spcPts val="1087"/>
+                <a:spcPts val="1015"/>
               </a:lnSpc>
             </a:pPr>
             <a:r>
-              <a:rPr sz="750" b="0">
+              <a:rPr sz="700" b="0">
                 <a:solidFill>
                   <a:srgbClr val="FFFFFF"/>
                 </a:solidFill>
@@ -3557,13 +3557,13 @@
         </p:nvCxnSpPr>
         <p:spPr>
           <a:xfrm>
-            <a:off x="252000" y="1720800"/>
+            <a:off x="252000" y="1598400"/>
             <a:ext cx="2736000" cy="0"/>
           </a:xfrm>
           <a:prstGeom prst="line">
             <a:avLst/>
           </a:prstGeom>
-          <a:ln w="5760">
+          <a:ln w="3600">
             <a:solidFill>
               <a:srgbClr val="2A2F38"/>
             </a:solidFill>
@@ -3598,14 +3598,54 @@
       <p:grpSpPr/>
       <p:sp>
         <p:nvSpPr>
-          <p:cNvPr id="2" name="Rectangle 1"/>
+          <p:cNvPr id="2" name="텍스트"/>
+          <p:cNvSpPr txBox="1"/>
+          <p:nvPr/>
+        </p:nvSpPr>
+        <p:spPr>
+          <a:xfrm>
+            <a:off x="252000" y="252000"/>
+            <a:ext cx="1080000" cy="99061"/>
+          </a:xfrm>
+          <a:prstGeom prst="rect">
+            <a:avLst/>
+          </a:prstGeom>
+          <a:noFill/>
+        </p:spPr>
+        <p:txBody>
+          <a:bodyPr wrap="square" lIns="0" rIns="0" tIns="0" bIns="0" anchor="t">
+            <a:spAutoFit/>
+          </a:bodyPr>
+          <a:lstStyle/>
+          <a:p>
+            <a:pPr algn="l">
+              <a:lnSpc>
+                <a:spcPts val="754"/>
+              </a:lnSpc>
+            </a:pPr>
+            <a:r>
+              <a:rPr sz="520" b="1" spc="240">
+                <a:solidFill>
+                  <a:srgbClr val="6B7280"/>
+                </a:solidFill>
+                <a:latin typeface="맑은 고딕"/>
+                <a:ea typeface="맑은 고딕"/>
+              </a:rPr>
+              <a:t>대표 메뉴</a:t>
+            </a:r>
+          </a:p>
+        </p:txBody>
+      </p:sp>
+      <p:sp>
+        <p:nvSpPr>
+          <p:cNvPr id="3" name="Rectangle 2"/>
           <p:cNvSpPr/>
           <p:nvPr/>
         </p:nvSpPr>
         <p:spPr>
           <a:xfrm>
-            <a:off x="0" y="0"/>
-            <a:ext cx="3240000" cy="1800000"/>
+            <a:off x="252000" y="352800"/>
+            <a:ext cx="108000" cy="14400"/>
           </a:xfrm>
           <a:prstGeom prst="rect">
             <a:avLst/>
@@ -3625,132 +3665,37 @@
           </a:p>
         </p:txBody>
       </p:sp>
-      <p:sp>
-        <p:nvSpPr>
-          <p:cNvPr id="3" name="Freeform 2"/>
-          <p:cNvSpPr/>
+      <p:cxnSp>
+        <p:nvCxnSpPr>
+          <p:cNvPr id="4" name="Connector 3"/>
+          <p:cNvCxnSpPr/>
           <p:nvPr/>
-        </p:nvSpPr>
-        <p:spPr>
-          <a:xfrm>
-            <a:off x="2412000" y="972000"/>
-            <a:ext cx="828000" cy="828000"/>
-          </a:xfrm>
-          <a:custGeom>
+        </p:nvCxnSpPr>
+        <p:spPr>
+          <a:xfrm>
+            <a:off x="252000" y="453600"/>
+            <a:ext cx="1512000" cy="0"/>
+          </a:xfrm>
+          <a:prstGeom prst="line">
             <a:avLst/>
-            <a:gdLst/>
-            <a:ahLst/>
-            <a:cxnLst/>
-            <a:rect l="l" t="t" r="r" b="b"/>
-            <a:pathLst>
-              <a:path w="828000" h="828000">
-                <a:moveTo>
-                  <a:pt x="828000" y="828000"/>
-                </a:moveTo>
-                <a:lnTo>
-                  <a:pt x="0" y="828000"/>
-                </a:lnTo>
-                <a:lnTo>
-                  <a:pt x="1773" y="773846"/>
-                </a:lnTo>
-                <a:lnTo>
-                  <a:pt x="7084" y="719924"/>
-                </a:lnTo>
-                <a:lnTo>
-                  <a:pt x="15910" y="666465"/>
-                </a:lnTo>
-                <a:lnTo>
-                  <a:pt x="28213" y="613698"/>
-                </a:lnTo>
-                <a:lnTo>
-                  <a:pt x="43942" y="561848"/>
-                </a:lnTo>
-                <a:lnTo>
-                  <a:pt x="63028" y="511138"/>
-                </a:lnTo>
-                <a:lnTo>
-                  <a:pt x="85389" y="461785"/>
-                </a:lnTo>
-                <a:lnTo>
-                  <a:pt x="110931" y="414000"/>
-                </a:lnTo>
-                <a:lnTo>
-                  <a:pt x="139543" y="367988"/>
-                </a:lnTo>
-                <a:lnTo>
-                  <a:pt x="171103" y="323946"/>
-                </a:lnTo>
-                <a:lnTo>
-                  <a:pt x="205477" y="282062"/>
-                </a:lnTo>
-                <a:lnTo>
-                  <a:pt x="242516" y="242516"/>
-                </a:lnTo>
-                <a:lnTo>
-                  <a:pt x="282062" y="205477"/>
-                </a:lnTo>
-                <a:lnTo>
-                  <a:pt x="323946" y="171103"/>
-                </a:lnTo>
-                <a:lnTo>
-                  <a:pt x="367988" y="139543"/>
-                </a:lnTo>
-                <a:lnTo>
-                  <a:pt x="414000" y="110931"/>
-                </a:lnTo>
-                <a:lnTo>
-                  <a:pt x="461785" y="85389"/>
-                </a:lnTo>
-                <a:lnTo>
-                  <a:pt x="511138" y="63028"/>
-                </a:lnTo>
-                <a:lnTo>
-                  <a:pt x="561848" y="43942"/>
-                </a:lnTo>
-                <a:lnTo>
-                  <a:pt x="613698" y="28213"/>
-                </a:lnTo>
-                <a:lnTo>
-                  <a:pt x="666465" y="15910"/>
-                </a:lnTo>
-                <a:lnTo>
-                  <a:pt x="719924" y="7084"/>
-                </a:lnTo>
-                <a:lnTo>
-                  <a:pt x="773846" y="1773"/>
-                </a:lnTo>
-                <a:lnTo>
-                  <a:pt x="828000" y="0"/>
-                </a:lnTo>
-                <a:close/>
-              </a:path>
-            </a:pathLst>
-          </a:custGeom>
-          <a:solidFill>
-            <a:srgbClr val="FFD438"/>
-          </a:solidFill>
-          <a:ln>
-            <a:noFill/>
+          </a:prstGeom>
+          <a:ln w="3600">
+            <a:solidFill>
+              <a:srgbClr val="DCDFE4"/>
+            </a:solidFill>
           </a:ln>
         </p:spPr>
-        <p:txBody>
-          <a:bodyPr rtlCol="0" anchor="ctr"/>
-          <a:lstStyle/>
-          <a:p>
-            <a:pPr algn="ctr"/>
-          </a:p>
-        </p:txBody>
-      </p:sp>
-      <p:sp>
-        <p:nvSpPr>
-          <p:cNvPr id="4" name="텍스트"/>
+      </p:cxnSp>
+      <p:sp>
+        <p:nvSpPr>
+          <p:cNvPr id="5" name="텍스트"/>
           <p:cNvSpPr txBox="1"/>
           <p:nvPr/>
         </p:nvSpPr>
         <p:spPr>
           <a:xfrm>
-            <a:off x="252000" y="432000"/>
-            <a:ext cx="2304000" cy="720000"/>
+            <a:off x="252000" y="507600"/>
+            <a:ext cx="216000" cy="95251"/>
           </a:xfrm>
           <a:prstGeom prst="rect">
             <a:avLst/>
@@ -3765,49 +3710,234 @@
           <a:p>
             <a:pPr algn="l">
               <a:lnSpc>
-                <a:spcPts val="1884"/>
+                <a:spcPts val="725"/>
               </a:lnSpc>
             </a:pPr>
             <a:r>
-              <a:rPr sz="1300" b="1">
+              <a:rPr sz="500" b="1" spc="100">
+                <a:solidFill>
+                  <a:srgbClr val="6B7280"/>
+                </a:solidFill>
+                <a:latin typeface="맑은 고딕"/>
+                <a:ea typeface="맑은 고딕"/>
+              </a:rPr>
+              <a:t>01</a:t>
+            </a:r>
+          </a:p>
+        </p:txBody>
+      </p:sp>
+      <p:sp>
+        <p:nvSpPr>
+          <p:cNvPr id="6" name="텍스트"/>
+          <p:cNvSpPr txBox="1"/>
+          <p:nvPr/>
+        </p:nvSpPr>
+        <p:spPr>
+          <a:xfrm>
+            <a:off x="489600" y="496800"/>
+            <a:ext cx="1260000" cy="133351"/>
+          </a:xfrm>
+          <a:prstGeom prst="rect">
+            <a:avLst/>
+          </a:prstGeom>
+          <a:noFill/>
+        </p:spPr>
+        <p:txBody>
+          <a:bodyPr wrap="square" lIns="0" rIns="0" tIns="0" bIns="0" anchor="t">
+            <a:spAutoFit/>
+          </a:bodyPr>
+          <a:lstStyle/>
+          <a:p>
+            <a:pPr algn="l">
+              <a:lnSpc>
+                <a:spcPts val="1015"/>
+              </a:lnSpc>
+            </a:pPr>
+            <a:r>
+              <a:rPr sz="700" b="0">
                 <a:solidFill>
                   <a:srgbClr val="12151C"/>
                 </a:solidFill>
                 <a:latin typeface="맑은 고딕"/>
                 <a:ea typeface="맑은 고딕"/>
               </a:rPr>
-              <a:t>좋은 재료로</a:t>
-            </a:r>
-          </a:p>
+              <a:t>핸드드립</a:t>
+            </a:r>
+          </a:p>
+        </p:txBody>
+      </p:sp>
+      <p:cxnSp>
+        <p:nvCxnSpPr>
+          <p:cNvPr id="7" name="Connector 6"/>
+          <p:cNvCxnSpPr/>
+          <p:nvPr/>
+        </p:nvCxnSpPr>
+        <p:spPr>
+          <a:xfrm>
+            <a:off x="252000" y="640800"/>
+            <a:ext cx="1512000" cy="0"/>
+          </a:xfrm>
+          <a:prstGeom prst="line">
+            <a:avLst/>
+          </a:prstGeom>
+          <a:ln w="3600">
+            <a:solidFill>
+              <a:srgbClr val="DCDFE4"/>
+            </a:solidFill>
+          </a:ln>
+        </p:spPr>
+      </p:cxnSp>
+      <p:sp>
+        <p:nvSpPr>
+          <p:cNvPr id="8" name="텍스트"/>
+          <p:cNvSpPr txBox="1"/>
+          <p:nvPr/>
+        </p:nvSpPr>
+        <p:spPr>
+          <a:xfrm>
+            <a:off x="252000" y="694800"/>
+            <a:ext cx="216000" cy="95251"/>
+          </a:xfrm>
+          <a:prstGeom prst="rect">
+            <a:avLst/>
+          </a:prstGeom>
+          <a:noFill/>
+        </p:spPr>
+        <p:txBody>
+          <a:bodyPr wrap="square" lIns="0" rIns="0" tIns="0" bIns="0" anchor="t">
+            <a:spAutoFit/>
+          </a:bodyPr>
+          <a:lstStyle/>
           <a:p>
             <a:pPr algn="l">
               <a:lnSpc>
-                <a:spcPts val="1884"/>
+                <a:spcPts val="725"/>
               </a:lnSpc>
             </a:pPr>
             <a:r>
-              <a:rPr sz="1300" b="1">
+              <a:rPr sz="500" b="1" spc="100">
+                <a:solidFill>
+                  <a:srgbClr val="6B7280"/>
+                </a:solidFill>
+                <a:latin typeface="맑은 고딕"/>
+                <a:ea typeface="맑은 고딕"/>
+              </a:rPr>
+              <a:t>02</a:t>
+            </a:r>
+          </a:p>
+        </p:txBody>
+      </p:sp>
+      <p:sp>
+        <p:nvSpPr>
+          <p:cNvPr id="9" name="텍스트"/>
+          <p:cNvSpPr txBox="1"/>
+          <p:nvPr/>
+        </p:nvSpPr>
+        <p:spPr>
+          <a:xfrm>
+            <a:off x="489600" y="684000"/>
+            <a:ext cx="1260000" cy="133351"/>
+          </a:xfrm>
+          <a:prstGeom prst="rect">
+            <a:avLst/>
+          </a:prstGeom>
+          <a:noFill/>
+        </p:spPr>
+        <p:txBody>
+          <a:bodyPr wrap="square" lIns="0" rIns="0" tIns="0" bIns="0" anchor="t">
+            <a:spAutoFit/>
+          </a:bodyPr>
+          <a:lstStyle/>
+          <a:p>
+            <a:pPr algn="l">
+              <a:lnSpc>
+                <a:spcPts val="1015"/>
+              </a:lnSpc>
+            </a:pPr>
+            <a:r>
+              <a:rPr sz="700" b="0">
                 <a:solidFill>
                   <a:srgbClr val="12151C"/>
                 </a:solidFill>
                 <a:latin typeface="맑은 고딕"/>
                 <a:ea typeface="맑은 고딕"/>
               </a:rPr>
-              <a:t>정직하게 만듭니다</a:t>
-            </a:r>
-          </a:p>
-        </p:txBody>
-      </p:sp>
-      <p:sp>
-        <p:nvSpPr>
-          <p:cNvPr id="5" name="텍스트"/>
+              <a:t>케이터링</a:t>
+            </a:r>
+          </a:p>
+        </p:txBody>
+      </p:sp>
+      <p:cxnSp>
+        <p:nvCxnSpPr>
+          <p:cNvPr id="10" name="Connector 9"/>
+          <p:cNvCxnSpPr/>
+          <p:nvPr/>
+        </p:nvCxnSpPr>
+        <p:spPr>
+          <a:xfrm>
+            <a:off x="252000" y="828000"/>
+            <a:ext cx="1512000" cy="0"/>
+          </a:xfrm>
+          <a:prstGeom prst="line">
+            <a:avLst/>
+          </a:prstGeom>
+          <a:ln w="3600">
+            <a:solidFill>
+              <a:srgbClr val="DCDFE4"/>
+            </a:solidFill>
+          </a:ln>
+        </p:spPr>
+      </p:cxnSp>
+      <p:sp>
+        <p:nvSpPr>
+          <p:cNvPr id="11" name="텍스트"/>
           <p:cNvSpPr txBox="1"/>
           <p:nvPr/>
         </p:nvSpPr>
         <p:spPr>
           <a:xfrm>
-            <a:off x="252000" y="1476000"/>
-            <a:ext cx="1800000" cy="133351"/>
+            <a:off x="252000" y="882000"/>
+            <a:ext cx="216000" cy="95251"/>
+          </a:xfrm>
+          <a:prstGeom prst="rect">
+            <a:avLst/>
+          </a:prstGeom>
+          <a:noFill/>
+        </p:spPr>
+        <p:txBody>
+          <a:bodyPr wrap="square" lIns="0" rIns="0" tIns="0" bIns="0" anchor="t">
+            <a:spAutoFit/>
+          </a:bodyPr>
+          <a:lstStyle/>
+          <a:p>
+            <a:pPr algn="l">
+              <a:lnSpc>
+                <a:spcPts val="725"/>
+              </a:lnSpc>
+            </a:pPr>
+            <a:r>
+              <a:rPr sz="500" b="1" spc="100">
+                <a:solidFill>
+                  <a:srgbClr val="6B7280"/>
+                </a:solidFill>
+                <a:latin typeface="맑은 고딕"/>
+                <a:ea typeface="맑은 고딕"/>
+              </a:rPr>
+              <a:t>03</a:t>
+            </a:r>
+          </a:p>
+        </p:txBody>
+      </p:sp>
+      <p:sp>
+        <p:nvSpPr>
+          <p:cNvPr id="12" name="텍스트"/>
+          <p:cNvSpPr txBox="1"/>
+          <p:nvPr/>
+        </p:nvSpPr>
+        <p:spPr>
+          <a:xfrm>
+            <a:off x="489600" y="871200"/>
+            <a:ext cx="1260000" cy="133351"/>
           </a:xfrm>
           <a:prstGeom prst="rect">
             <a:avLst/>
@@ -3826,7 +3956,383 @@
               </a:lnSpc>
             </a:pPr>
             <a:r>
-              <a:rPr sz="700" b="1" spc="200">
+              <a:rPr sz="700" b="0">
+                <a:solidFill>
+                  <a:srgbClr val="12151C"/>
+                </a:solidFill>
+                <a:latin typeface="맑은 고딕"/>
+                <a:ea typeface="맑은 고딕"/>
+              </a:rPr>
+              <a:t>샐러드</a:t>
+            </a:r>
+          </a:p>
+        </p:txBody>
+      </p:sp>
+      <p:cxnSp>
+        <p:nvCxnSpPr>
+          <p:cNvPr id="13" name="Connector 12"/>
+          <p:cNvCxnSpPr/>
+          <p:nvPr/>
+        </p:nvCxnSpPr>
+        <p:spPr>
+          <a:xfrm>
+            <a:off x="252000" y="1015200"/>
+            <a:ext cx="1512000" cy="0"/>
+          </a:xfrm>
+          <a:prstGeom prst="line">
+            <a:avLst/>
+          </a:prstGeom>
+          <a:ln w="3600">
+            <a:solidFill>
+              <a:srgbClr val="DCDFE4"/>
+            </a:solidFill>
+          </a:ln>
+        </p:spPr>
+      </p:cxnSp>
+      <p:sp>
+        <p:nvSpPr>
+          <p:cNvPr id="14" name="텍스트"/>
+          <p:cNvSpPr txBox="1"/>
+          <p:nvPr/>
+        </p:nvSpPr>
+        <p:spPr>
+          <a:xfrm>
+            <a:off x="252000" y="1069200"/>
+            <a:ext cx="216000" cy="95251"/>
+          </a:xfrm>
+          <a:prstGeom prst="rect">
+            <a:avLst/>
+          </a:prstGeom>
+          <a:noFill/>
+        </p:spPr>
+        <p:txBody>
+          <a:bodyPr wrap="square" lIns="0" rIns="0" tIns="0" bIns="0" anchor="t">
+            <a:spAutoFit/>
+          </a:bodyPr>
+          <a:lstStyle/>
+          <a:p>
+            <a:pPr algn="l">
+              <a:lnSpc>
+                <a:spcPts val="725"/>
+              </a:lnSpc>
+            </a:pPr>
+            <a:r>
+              <a:rPr sz="500" b="1" spc="100">
+                <a:solidFill>
+                  <a:srgbClr val="6B7280"/>
+                </a:solidFill>
+                <a:latin typeface="맑은 고딕"/>
+                <a:ea typeface="맑은 고딕"/>
+              </a:rPr>
+              <a:t>04</a:t>
+            </a:r>
+          </a:p>
+        </p:txBody>
+      </p:sp>
+      <p:sp>
+        <p:nvSpPr>
+          <p:cNvPr id="15" name="텍스트"/>
+          <p:cNvSpPr txBox="1"/>
+          <p:nvPr/>
+        </p:nvSpPr>
+        <p:spPr>
+          <a:xfrm>
+            <a:off x="489600" y="1058400"/>
+            <a:ext cx="1260000" cy="133351"/>
+          </a:xfrm>
+          <a:prstGeom prst="rect">
+            <a:avLst/>
+          </a:prstGeom>
+          <a:noFill/>
+        </p:spPr>
+        <p:txBody>
+          <a:bodyPr wrap="square" lIns="0" rIns="0" tIns="0" bIns="0" anchor="t">
+            <a:spAutoFit/>
+          </a:bodyPr>
+          <a:lstStyle/>
+          <a:p>
+            <a:pPr algn="l">
+              <a:lnSpc>
+                <a:spcPts val="1015"/>
+              </a:lnSpc>
+            </a:pPr>
+            <a:r>
+              <a:rPr sz="700" b="0">
+                <a:solidFill>
+                  <a:srgbClr val="12151C"/>
+                </a:solidFill>
+                <a:latin typeface="맑은 고딕"/>
+                <a:ea typeface="맑은 고딕"/>
+              </a:rPr>
+              <a:t>수제청</a:t>
+            </a:r>
+          </a:p>
+        </p:txBody>
+      </p:sp>
+      <p:cxnSp>
+        <p:nvCxnSpPr>
+          <p:cNvPr id="16" name="Connector 15"/>
+          <p:cNvCxnSpPr/>
+          <p:nvPr/>
+        </p:nvCxnSpPr>
+        <p:spPr>
+          <a:xfrm>
+            <a:off x="252000" y="1202400"/>
+            <a:ext cx="1512000" cy="0"/>
+          </a:xfrm>
+          <a:prstGeom prst="line">
+            <a:avLst/>
+          </a:prstGeom>
+          <a:ln w="3600">
+            <a:solidFill>
+              <a:srgbClr val="DCDFE4"/>
+            </a:solidFill>
+          </a:ln>
+        </p:spPr>
+      </p:cxnSp>
+      <p:sp>
+        <p:nvSpPr>
+          <p:cNvPr id="17" name="Rectangle 16"/>
+          <p:cNvSpPr/>
+          <p:nvPr/>
+        </p:nvSpPr>
+        <p:spPr>
+          <a:xfrm>
+            <a:off x="2088000" y="252000"/>
+            <a:ext cx="900000" cy="1296000"/>
+          </a:xfrm>
+          <a:prstGeom prst="rect">
+            <a:avLst/>
+          </a:prstGeom>
+          <a:solidFill>
+            <a:srgbClr val="FFC800"/>
+          </a:solidFill>
+          <a:ln>
+            <a:noFill/>
+          </a:ln>
+        </p:spPr>
+        <p:txBody>
+          <a:bodyPr rtlCol="0" anchor="ctr"/>
+          <a:lstStyle/>
+          <a:p>
+            <a:pPr algn="ctr"/>
+          </a:p>
+        </p:txBody>
+      </p:sp>
+      <p:sp>
+        <p:nvSpPr>
+          <p:cNvPr id="18" name="텍스트"/>
+          <p:cNvSpPr txBox="1"/>
+          <p:nvPr/>
+        </p:nvSpPr>
+        <p:spPr>
+          <a:xfrm>
+            <a:off x="2196000" y="360000"/>
+            <a:ext cx="684000" cy="95251"/>
+          </a:xfrm>
+          <a:prstGeom prst="rect">
+            <a:avLst/>
+          </a:prstGeom>
+          <a:noFill/>
+        </p:spPr>
+        <p:txBody>
+          <a:bodyPr wrap="square" lIns="0" rIns="0" tIns="0" bIns="0" anchor="t">
+            <a:spAutoFit/>
+          </a:bodyPr>
+          <a:lstStyle/>
+          <a:p>
+            <a:pPr algn="l">
+              <a:lnSpc>
+                <a:spcPts val="725"/>
+              </a:lnSpc>
+            </a:pPr>
+            <a:r>
+              <a:rPr sz="500" b="1" spc="240">
+                <a:solidFill>
+                  <a:srgbClr val="12151C">
+                    <a:alpha val="75000"/>
+                  </a:srgbClr>
+                </a:solidFill>
+                <a:latin typeface="맑은 고딕"/>
+                <a:ea typeface="맑은 고딕"/>
+              </a:rPr>
+              <a:t>INFO</a:t>
+            </a:r>
+          </a:p>
+        </p:txBody>
+      </p:sp>
+      <p:sp>
+        <p:nvSpPr>
+          <p:cNvPr id="19" name="텍스트"/>
+          <p:cNvSpPr txBox="1"/>
+          <p:nvPr/>
+        </p:nvSpPr>
+        <p:spPr>
+          <a:xfrm>
+            <a:off x="2196000" y="504000"/>
+            <a:ext cx="684000" cy="121921"/>
+          </a:xfrm>
+          <a:prstGeom prst="rect">
+            <a:avLst/>
+          </a:prstGeom>
+          <a:noFill/>
+        </p:spPr>
+        <p:txBody>
+          <a:bodyPr wrap="square" lIns="0" rIns="0" tIns="0" bIns="0" anchor="t">
+            <a:spAutoFit/>
+          </a:bodyPr>
+          <a:lstStyle/>
+          <a:p>
+            <a:pPr algn="l">
+              <a:lnSpc>
+                <a:spcPts val="927"/>
+              </a:lnSpc>
+            </a:pPr>
+            <a:r>
+              <a:rPr sz="640" b="1">
+                <a:solidFill>
+                  <a:srgbClr val="12151C"/>
+                </a:solidFill>
+                <a:latin typeface="맑은 고딕"/>
+                <a:ea typeface="맑은 고딕"/>
+              </a:rPr>
+              <a:t>매일 10:00 – 22:00</a:t>
+            </a:r>
+          </a:p>
+        </p:txBody>
+      </p:sp>
+      <p:cxnSp>
+        <p:nvCxnSpPr>
+          <p:cNvPr id="20" name="Connector 19"/>
+          <p:cNvCxnSpPr/>
+          <p:nvPr/>
+        </p:nvCxnSpPr>
+        <p:spPr>
+          <a:xfrm>
+            <a:off x="2196000" y="770400"/>
+            <a:ext cx="684000" cy="0"/>
+          </a:xfrm>
+          <a:prstGeom prst="line">
+            <a:avLst/>
+          </a:prstGeom>
+          <a:ln w="3600">
+            <a:solidFill>
+              <a:srgbClr val="12151C"/>
+            </a:solidFill>
+          </a:ln>
+        </p:spPr>
+      </p:cxnSp>
+      <p:sp>
+        <p:nvSpPr>
+          <p:cNvPr id="21" name="텍스트"/>
+          <p:cNvSpPr txBox="1"/>
+          <p:nvPr/>
+        </p:nvSpPr>
+        <p:spPr>
+          <a:xfrm>
+            <a:off x="2196000" y="849600"/>
+            <a:ext cx="684000" cy="91441"/>
+          </a:xfrm>
+          <a:prstGeom prst="rect">
+            <a:avLst/>
+          </a:prstGeom>
+          <a:noFill/>
+        </p:spPr>
+        <p:txBody>
+          <a:bodyPr wrap="square" lIns="0" rIns="0" tIns="0" bIns="0" anchor="t">
+            <a:spAutoFit/>
+          </a:bodyPr>
+          <a:lstStyle/>
+          <a:p>
+            <a:pPr algn="l">
+              <a:lnSpc>
+                <a:spcPts val="696"/>
+              </a:lnSpc>
+            </a:pPr>
+            <a:r>
+              <a:rPr sz="480" b="1" spc="140">
+                <a:solidFill>
+                  <a:srgbClr val="12151C">
+                    <a:alpha val="75000"/>
+                  </a:srgbClr>
+                </a:solidFill>
+                <a:latin typeface="맑은 고딕"/>
+                <a:ea typeface="맑은 고딕"/>
+              </a:rPr>
+              <a:t>BLOG</a:t>
+            </a:r>
+          </a:p>
+        </p:txBody>
+      </p:sp>
+      <p:sp>
+        <p:nvSpPr>
+          <p:cNvPr id="22" name="텍스트"/>
+          <p:cNvSpPr txBox="1"/>
+          <p:nvPr/>
+        </p:nvSpPr>
+        <p:spPr>
+          <a:xfrm>
+            <a:off x="2196000" y="957600"/>
+            <a:ext cx="684000" cy="121921"/>
+          </a:xfrm>
+          <a:prstGeom prst="rect">
+            <a:avLst/>
+          </a:prstGeom>
+          <a:noFill/>
+        </p:spPr>
+        <p:txBody>
+          <a:bodyPr wrap="square" lIns="0" rIns="0" tIns="0" bIns="0" anchor="t">
+            <a:spAutoFit/>
+          </a:bodyPr>
+          <a:lstStyle/>
+          <a:p>
+            <a:pPr algn="l">
+              <a:lnSpc>
+                <a:spcPts val="927"/>
+              </a:lnSpc>
+            </a:pPr>
+            <a:r>
+              <a:rPr sz="640" b="1">
+                <a:solidFill>
+                  <a:srgbClr val="12151C"/>
+                </a:solidFill>
+                <a:latin typeface="맑은 고딕"/>
+                <a:ea typeface="맑은 고딕"/>
+              </a:rPr>
+              <a:t>blog.example.com</a:t>
+            </a:r>
+          </a:p>
+        </p:txBody>
+      </p:sp>
+      <p:sp>
+        <p:nvSpPr>
+          <p:cNvPr id="23" name="텍스트"/>
+          <p:cNvSpPr txBox="1"/>
+          <p:nvPr/>
+        </p:nvSpPr>
+        <p:spPr>
+          <a:xfrm>
+            <a:off x="2196000" y="1368000"/>
+            <a:ext cx="720000" cy="106681"/>
+          </a:xfrm>
+          <a:prstGeom prst="rect">
+            <a:avLst/>
+          </a:prstGeom>
+          <a:noFill/>
+        </p:spPr>
+        <p:txBody>
+          <a:bodyPr wrap="square" lIns="0" rIns="0" tIns="0" bIns="0" anchor="t">
+            <a:spAutoFit/>
+          </a:bodyPr>
+          <a:lstStyle/>
+          <a:p>
+            <a:pPr algn="l">
+              <a:lnSpc>
+                <a:spcPts val="811"/>
+              </a:lnSpc>
+            </a:pPr>
+            <a:r>
+              <a:rPr sz="560" b="1" spc="80">
                 <a:solidFill>
                   <a:srgbClr val="12151C"/>
                 </a:solidFill>
